--- a/LabBook_3.pptx
+++ b/LabBook_3.pptx
@@ -11179,8 +11179,8 @@
           </a:p>
         </p:txBody>
       </p:sp>
-      <mc:AlternateContent xmlns:mc="http://schemas.openxmlformats.org/markup-compatibility/2006">
-        <mc:Choice xmlns:a14="http://schemas.microsoft.com/office/drawing/2010/main" Requires="a14">
+      <mc:AlternateContent xmlns:mc="http://schemas.openxmlformats.org/markup-compatibility/2006" xmlns:a14="http://schemas.microsoft.com/office/drawing/2010/main">
+        <mc:Choice Requires="a14">
           <p:sp>
             <p:nvSpPr>
               <p:cNvPr id="2" name="CuadroTexto 1">
@@ -12178,7 +12178,7 @@
             </p:txBody>
           </p:sp>
         </mc:Choice>
-        <mc:Fallback>
+        <mc:Fallback xmlns="">
           <p:sp>
             <p:nvSpPr>
               <p:cNvPr id="2" name="CuadroTexto 1">
@@ -12894,7 +12894,21 @@
                 <a:latin typeface="Arial" panose="020B0604020202020204" pitchFamily="34" charset="0"/>
                 <a:cs typeface="Arial" panose="020B0604020202020204" pitchFamily="34" charset="0"/>
               </a:rPr>
-              <a:t>The group index defines the spectral period because it determines the FSR of our device. As can be observed, the FSR is inversely proportional to the group index, meaning that the larger 𝑛𝑔ng	​ is, the smaller the FSR becomes. This occurs due to chromatic dispersion, that is, the different propagation velocities of the different wavelengths.</a:t>
+              <a:t>The group index defines the spectral period because it determines the FSR of our device. As can be observed, the FSR is inversely proportional to the group index, meaning that the larger </a:t>
+            </a:r>
+            <a:r>
+              <a:rPr lang="en-US" sz="1200">
+                <a:latin typeface="Arial" panose="020B0604020202020204" pitchFamily="34" charset="0"/>
+                <a:cs typeface="Arial" panose="020B0604020202020204" pitchFamily="34" charset="0"/>
+              </a:rPr>
+              <a:t>n_g</a:t>
+            </a:r>
+            <a:r>
+              <a:rPr lang="en-US" sz="1200" dirty="0">
+                <a:latin typeface="Arial" panose="020B0604020202020204" pitchFamily="34" charset="0"/>
+                <a:cs typeface="Arial" panose="020B0604020202020204" pitchFamily="34" charset="0"/>
+              </a:rPr>
+              <a:t>	​ is, the smaller the FSR becomes. This occurs due to chromatic dispersion, that is, the different propagation velocities of the different wavelengths.</a:t>
             </a:r>
           </a:p>
           <a:p>
@@ -13203,8 +13217,8 @@
           </a:p>
         </p:txBody>
       </p:sp>
-      <mc:AlternateContent xmlns:mc="http://schemas.openxmlformats.org/markup-compatibility/2006">
-        <mc:Choice xmlns:a14="http://schemas.microsoft.com/office/drawing/2010/main" Requires="a14">
+      <mc:AlternateContent xmlns:mc="http://schemas.openxmlformats.org/markup-compatibility/2006" xmlns:a14="http://schemas.microsoft.com/office/drawing/2010/main">
+        <mc:Choice Requires="a14">
           <p:sp>
             <p:nvSpPr>
               <p:cNvPr id="2" name="CuadroTexto 1">
@@ -13389,28 +13403,7 @@
                           <a:latin typeface="Cambria Math" panose="02040503050406030204" pitchFamily="18" charset="0"/>
                           <a:cs typeface="Arial" panose="020B0604020202020204" pitchFamily="34" charset="0"/>
                         </a:rPr>
-                        <m:t>=</m:t>
-                      </m:r>
-                      <m:r>
-                        <a:rPr lang="es-ES" sz="1200" i="1">
-                          <a:latin typeface="Cambria Math" panose="02040503050406030204" pitchFamily="18" charset="0"/>
-                          <a:cs typeface="Arial" panose="020B0604020202020204" pitchFamily="34" charset="0"/>
-                        </a:rPr>
-                        <m:t>0</m:t>
-                      </m:r>
-                      <m:r>
-                        <a:rPr lang="es-ES" sz="1200" i="1">
-                          <a:latin typeface="Cambria Math" panose="02040503050406030204" pitchFamily="18" charset="0"/>
-                          <a:cs typeface="Arial" panose="020B0604020202020204" pitchFamily="34" charset="0"/>
-                        </a:rPr>
-                        <m:t>.</m:t>
-                      </m:r>
-                      <m:r>
-                        <a:rPr lang="es-ES" sz="1200" i="1">
-                          <a:latin typeface="Cambria Math" panose="02040503050406030204" pitchFamily="18" charset="0"/>
-                          <a:cs typeface="Arial" panose="020B0604020202020204" pitchFamily="34" charset="0"/>
-                        </a:rPr>
-                        <m:t>5</m:t>
+                        <m:t>=0.5</m:t>
                       </m:r>
                     </m:oMath>
                   </m:oMathPara>
@@ -13487,14 +13480,7 @@
                               <a:latin typeface="Cambria Math" panose="02040503050406030204" pitchFamily="18" charset="0"/>
                               <a:cs typeface="Arial" panose="020B0604020202020204" pitchFamily="34" charset="0"/>
                             </a:rPr>
-                            <m:t>1</m:t>
-                          </m:r>
-                          <m:r>
-                            <a:rPr lang="es-ES" sz="1200" i="1">
-                              <a:latin typeface="Cambria Math" panose="02040503050406030204" pitchFamily="18" charset="0"/>
-                              <a:cs typeface="Arial" panose="020B0604020202020204" pitchFamily="34" charset="0"/>
-                            </a:rPr>
-                            <m:t>+</m:t>
+                            <m:t>1+</m:t>
                           </m:r>
                           <m:sSup>
                             <m:sSupPr>
@@ -13571,7 +13557,7 @@
             </p:txBody>
           </p:sp>
         </mc:Choice>
-        <mc:Fallback>
+        <mc:Fallback xmlns="">
           <p:sp>
             <p:nvSpPr>
               <p:cNvPr id="2" name="CuadroTexto 1">
